--- a/canvas_material/lectures/powerpoint/Session17-DesignToWork.pptx
+++ b/canvas_material/lectures/powerpoint/Session17-DesignToWork.pptx
@@ -1315,7 +1315,7 @@
           <a:p>
             <a:r>
               <a:rPr lang="en-US" dirty="0"/>
-              <a:t>Demo it live on Prop Loft or a scratch org, about four minutes, then leave this up during the workshop. Step 1 imports existing issues because auto-add only catches new ones, and free organizations get one auto-add workflow. Step 4 is the trap: projects start private, so a stranger or the auditor sees nothing. Say it twice. The page has every click; students don't need to copy this down.</a:t>
+              <a:t>Demo it live on Prop Loft or a scratch org, about four minutes, then leave this up during the workshop. Step 1 imports existing issues because auto-add only catches new ones, and free organizations get one auto-add workflow. Step 3: the board holds issues only; a PR shows on the card of the issue it closes. Which workflows start out on varies, so check each one. Step 5: on a board the setting is called Swimlanes, and an unsaved view shows a dot on its tab and reverts. Step 4 is the trap: projects start private, so a stranger or the auditor sees nothing. Say it twice. The page has every click; students don't need to copy this down.</a:t>
             </a:r>
             <a:endParaRPr lang="en-US" dirty="0"/>
           </a:p>
@@ -12531,7 +12531,7 @@
                 <a:ea typeface="Calibri" pitchFamily="34" charset="-122"/>
                 <a:cs typeface="Calibri" pitchFamily="34" charset="-120"/>
               </a:rPr>
-              <a:t>Turn on auto-add</a:t>
+              <a:t>Set up the workflows</a:t>
             </a:r>
             <a:endParaRPr lang="en-US" sz="1700" dirty="0"/>
           </a:p>
@@ -12570,7 +12570,7 @@
                 <a:ea typeface="Calibri" pitchFamily="34" charset="-122"/>
                 <a:cs typeface="Calibri" pitchFamily="34" charset="-120"/>
               </a:rPr>
-              <a:t>⋯ → Workflows → Auto-add: is:issue,pr is:open. Closed and merged → Done is already on.</a:t>
+              <a:t>Workflows: auto-add is:issue is:open; new items → Backlog; closed and merged → Done.</a:t>
             </a:r>
             <a:endParaRPr lang="en-US" sz="1550" dirty="0"/>
           </a:p>
@@ -12902,7 +12902,7 @@
                 <a:ea typeface="Calibri" pitchFamily="34" charset="-122"/>
                 <a:cs typeface="Calibri" pitchFamily="34" charset="-120"/>
               </a:rPr>
-              <a:t>Grouped by milestone (what's left?) and by parent issue (how's each epic?).</a:t>
+              <a:t>Swimlanes by milestone (what's left?) and by parent issue (how's each epic?). Save each.</a:t>
             </a:r>
             <a:endParaRPr lang="en-US" sz="1550" dirty="0"/>
           </a:p>
